--- a/reports/Round1_Data_Detective.pptx
+++ b/reports/Round1_Data_Detective.pptx
@@ -3088,7 +3088,7 @@
     <p:bg>
       <p:bgPr>
         <a:solidFill>
-          <a:srgbClr val="1A1A2E"/>
+          <a:srgbClr val="1E1E2E"/>
         </a:solidFill>
         <a:effectLst/>
       </p:bgPr>
@@ -3108,8 +3108,8 @@
         </p:nvSpPr>
         <p:spPr>
           <a:xfrm>
-            <a:off x="731520" y="457200"/>
-            <a:ext cx="10058400" cy="914400"/>
+            <a:off x="400000" y="600000"/>
+            <a:ext cx="11391695" cy="800000"/>
           </a:xfrm>
           <a:prstGeom prst="rect">
             <a:avLst/>
@@ -3122,10 +3122,10 @@
           </a:bodyPr>
           <a:lstStyle/>
           <a:p>
-            <a:pPr algn="l">
-              <a:defRPr sz="3600" b="1">
-                <a:solidFill>
-                  <a:srgbClr val="00D2FF"/>
+            <a:pPr algn="ctr">
+              <a:defRPr sz="3200" b="1">
+                <a:solidFill>
+                  <a:srgbClr val="FFFFFF"/>
                 </a:solidFill>
                 <a:latin typeface="Calibri"/>
               </a:defRPr>
@@ -3144,8 +3144,8 @@
         </p:nvSpPr>
         <p:spPr>
           <a:xfrm>
-            <a:off x="731520" y="1280160"/>
-            <a:ext cx="10058400" cy="457200"/>
+            <a:off x="400000" y="1500000"/>
+            <a:ext cx="11391695" cy="500000"/>
           </a:xfrm>
           <a:prstGeom prst="rect">
             <a:avLst/>
@@ -3158,10 +3158,10 @@
           </a:bodyPr>
           <a:lstStyle/>
           <a:p>
-            <a:pPr algn="l">
+            <a:pPr algn="ctr">
               <a:defRPr sz="1800" b="0">
                 <a:solidFill>
-                  <a:srgbClr val="CCCCCC"/>
+                  <a:srgbClr val="0096D6"/>
                 </a:solidFill>
                 <a:latin typeface="Calibri"/>
               </a:defRPr>
@@ -3180,8 +3180,8 @@
         </p:nvSpPr>
         <p:spPr>
           <a:xfrm>
-            <a:off x="731520" y="2011680"/>
-            <a:ext cx="10058400" cy="4114800"/>
+            <a:off x="400000" y="2200000"/>
+            <a:ext cx="11391695" cy="3500000"/>
           </a:xfrm>
           <a:prstGeom prst="rect">
             <a:avLst/>
@@ -3196,29 +3196,27 @@
           <a:p>
             <a:pPr>
               <a:spcAft>
-                <a:spcPts val="600"/>
+                <a:spcPts val="400"/>
               </a:spcAft>
-              <a:defRPr sz="1800">
-                <a:solidFill>
-                  <a:srgbClr val="CCCCCC"/>
-                </a:solidFill>
-                <a:latin typeface="Calibri"/>
+              <a:defRPr sz="1400">
+                <a:solidFill>
+                  <a:srgbClr val="FFFFFF"/>
+                </a:solidFill>
               </a:defRPr>
             </a:pPr>
             <a:r>
-              <a:t>Dataset: 445 labeled training images, 115 test images</a:t>
+              <a:t>Dataset: 445 labeled training images, 115 test images — 6 classes</a:t>
             </a:r>
           </a:p>
           <a:p>
             <a:pPr>
               <a:spcAft>
-                <a:spcPts val="600"/>
+                <a:spcPts val="400"/>
               </a:spcAft>
-              <a:defRPr sz="1800">
-                <a:solidFill>
-                  <a:srgbClr val="CCCCCC"/>
-                </a:solidFill>
-                <a:latin typeface="Calibri"/>
+              <a:defRPr sz="1400">
+                <a:solidFill>
+                  <a:srgbClr val="FFFFFF"/>
+                </a:solidFill>
               </a:defRPr>
             </a:pPr>
             <a:r>
@@ -3228,65 +3226,82 @@
           <a:p>
             <a:pPr>
               <a:spcAft>
-                <a:spcPts val="600"/>
+                <a:spcPts val="400"/>
               </a:spcAft>
-              <a:defRPr sz="1800">
-                <a:solidFill>
-                  <a:srgbClr val="CCCCCC"/>
-                </a:solidFill>
-                <a:latin typeface="Calibri"/>
+              <a:defRPr sz="1400">
+                <a:solidFill>
+                  <a:srgbClr val="FFFFFF"/>
+                </a:solidFill>
               </a:defRPr>
             </a:pPr>
             <a:r>
-              <a:t>Imbalance ratio: 2.15× (trash is most underrepresented)</a:t>
+              <a:t>Imbalance ratio: 2.15× (trash most underrepresented)</a:t>
             </a:r>
           </a:p>
           <a:p>
             <a:pPr>
               <a:spcAft>
-                <a:spcPts val="600"/>
+                <a:spcPts val="400"/>
               </a:spcAft>
-              <a:defRPr sz="1800">
-                <a:solidFill>
-                  <a:srgbClr val="CCCCCC"/>
-                </a:solidFill>
-                <a:latin typeface="Calibri"/>
+              <a:defRPr sz="1400">
+                <a:solidFill>
+                  <a:srgbClr val="FFFFFF"/>
+                </a:solidFill>
               </a:defRPr>
             </a:pPr>
             <a:r>
-              <a:t>Source: Waste classification image set with intentionally introduced quality defects</a:t>
+              <a:t>Baseline model: ResNet-18 (not modified per competition rules)</a:t>
             </a:r>
           </a:p>
           <a:p>
             <a:pPr>
               <a:spcAft>
-                <a:spcPts val="600"/>
+                <a:spcPts val="400"/>
               </a:spcAft>
-              <a:defRPr sz="1800">
-                <a:solidFill>
-                  <a:srgbClr val="CCCCCC"/>
+              <a:defRPr sz="1400">
+                <a:solidFill>
+                  <a:srgbClr val="FFFFFF"/>
+                </a:solidFill>
+              </a:defRPr>
+            </a:pPr>
+            <a:r>
+              <a:t>Approach: Data-centric forensic audit with evidence-backed findings</a:t>
+            </a:r>
+          </a:p>
+        </p:txBody>
+      </p:sp>
+      <p:sp>
+        <p:nvSpPr>
+          <p:cNvPr id="5" name="TextBox 4"/>
+          <p:cNvSpPr txBox="1"/>
+          <p:nvPr/>
+        </p:nvSpPr>
+        <p:spPr>
+          <a:xfrm>
+            <a:off x="400000" y="5800000"/>
+            <a:ext cx="11391695" cy="400000"/>
+          </a:xfrm>
+          <a:prstGeom prst="rect">
+            <a:avLst/>
+          </a:prstGeom>
+          <a:noFill/>
+        </p:spPr>
+        <p:txBody>
+          <a:bodyPr wrap="square">
+            <a:spAutoFit/>
+          </a:bodyPr>
+          <a:lstStyle/>
+          <a:p>
+            <a:pPr algn="ctr">
+              <a:defRPr sz="1100" b="0">
+                <a:solidFill>
+                  <a:srgbClr val="0096D6"/>
                 </a:solidFill>
                 <a:latin typeface="Calibri"/>
               </a:defRPr>
             </a:pPr>
             <a:r>
-              <a:t>Baseline model: Fixed ResNet-18 (not modified per competition rules)</a:t>
-            </a:r>
-          </a:p>
-          <a:p>
-            <a:pPr>
-              <a:spcAft>
-                <a:spcPts val="600"/>
-              </a:spcAft>
-              <a:defRPr sz="1800">
-                <a:solidFill>
-                  <a:srgbClr val="CCCCCC"/>
-                </a:solidFill>
-                <a:latin typeface="Calibri"/>
-              </a:defRPr>
-            </a:pPr>
-            <a:r>
-              <a:t>Approach: Data-centric audit — identify issues, gather evidence, propose fixes</a:t>
+              <a:t>Key hidden discoveries: train/test leak (4 images), deliberately uniform label noise (71.5%), and severe class imbalance</a:t>
             </a:r>
           </a:p>
         </p:txBody>
@@ -3305,7 +3320,7 @@
     <p:bg>
       <p:bgPr>
         <a:solidFill>
-          <a:srgbClr val="1A1A2E"/>
+          <a:srgbClr val="F5F5FA"/>
         </a:solidFill>
         <a:effectLst/>
       </p:bgPr>
@@ -3325,8 +3340,8 @@
         </p:nvSpPr>
         <p:spPr>
           <a:xfrm>
-            <a:off x="731520" y="457200"/>
-            <a:ext cx="10058400" cy="914400"/>
+            <a:off x="400000" y="200000"/>
+            <a:ext cx="11391695" cy="600000"/>
           </a:xfrm>
           <a:prstGeom prst="rect">
             <a:avLst/>
@@ -3340,9 +3355,9 @@
           <a:lstStyle/>
           <a:p>
             <a:pPr algn="l">
-              <a:defRPr sz="3600" b="1">
-                <a:solidFill>
-                  <a:srgbClr val="00D2FF"/>
+              <a:defRPr sz="2800" b="1">
+                <a:solidFill>
+                  <a:srgbClr val="1E1E2E"/>
                 </a:solidFill>
                 <a:latin typeface="Calibri"/>
               </a:defRPr>
@@ -3361,8 +3376,8 @@
         </p:nvSpPr>
         <p:spPr>
           <a:xfrm>
-            <a:off x="731520" y="1280160"/>
-            <a:ext cx="10058400" cy="5029200"/>
+            <a:off x="400000" y="900000"/>
+            <a:ext cx="11391695" cy="5500000"/>
           </a:xfrm>
           <a:prstGeom prst="rect">
             <a:avLst/>
@@ -3377,81 +3392,106 @@
           <a:p>
             <a:pPr>
               <a:spcAft>
-                <a:spcPts val="600"/>
+                <a:spcPts val="400"/>
               </a:spcAft>
-              <a:defRPr sz="1600">
-                <a:solidFill>
-                  <a:srgbClr val="CCCCCC"/>
-                </a:solidFill>
-                <a:latin typeface="Calibri"/>
+              <a:defRPr sz="1200">
+                <a:solidFill>
+                  <a:srgbClr val="1E1E2E"/>
+                </a:solidFill>
               </a:defRPr>
             </a:pPr>
             <a:r>
-              <a:t>1. Wrong Labels — 71.5% (318/445) images are in the wrong folder. Folder names and filename-prefix labels disagree on most samples. Filename labels are equally unreliable.</a:t>
+              <a:t>1. Wrong Labels — 71.5% (318/445) images mislabeled. Folder and filename-prefix labels both unreliable (28.5% agreement).</a:t>
             </a:r>
           </a:p>
           <a:p>
             <a:pPr>
               <a:spcAft>
-                <a:spcPts val="600"/>
+                <a:spcPts val="400"/>
               </a:spcAft>
-              <a:defRPr sz="1600">
-                <a:solidFill>
-                  <a:srgbClr val="CCCCCC"/>
-                </a:solidFill>
-                <a:latin typeface="Calibri"/>
+              <a:defRPr sz="1200">
+                <a:solidFill>
+                  <a:srgbClr val="1E1E2E"/>
+                </a:solidFill>
               </a:defRPr>
             </a:pPr>
             <a:r>
-              <a:t>2. Duplicate Images — 6 exact duplicate groups and 11 near-duplicate pairs found. Redundant samples inflate perceived dataset size and leak between train/validation splits.</a:t>
+              <a:t>2. UNIFORM Label Noise — Each wrong class gets 13-20% share (≈uniform). This is deliberately crafted, not real-world noise.</a:t>
             </a:r>
           </a:p>
           <a:p>
             <a:pPr>
               <a:spcAft>
-                <a:spcPts val="600"/>
+                <a:spcPts val="400"/>
               </a:spcAft>
-              <a:defRPr sz="1600">
-                <a:solidFill>
-                  <a:srgbClr val="CCCCCC"/>
-                </a:solidFill>
-                <a:latin typeface="Calibri"/>
+              <a:defRPr sz="1200">
+                <a:solidFill>
+                  <a:srgbClr val="1E1E2E"/>
+                </a:solidFill>
               </a:defRPr>
             </a:pPr>
             <a:r>
-              <a:t>3. Blurry / Low-Quality Images — 157 images (35.3%) have Laplacian variance &lt; 100. Minimum variance is 0.6 (effectively blank). These add noise without signal.</a:t>
+              <a:t>3. Train/Test Leak — 4 leaked images found: 3 exact perceptual duplicates + 1 near-duplicate (hamming distance=4).</a:t>
             </a:r>
           </a:p>
           <a:p>
             <a:pPr>
               <a:spcAft>
-                <a:spcPts val="600"/>
+                <a:spcPts val="400"/>
               </a:spcAft>
-              <a:defRPr sz="1600">
-                <a:solidFill>
-                  <a:srgbClr val="CCCCCC"/>
-                </a:solidFill>
-                <a:latin typeface="Calibri"/>
+              <a:defRPr sz="1200">
+                <a:solidFill>
+                  <a:srgbClr val="1E1E2E"/>
+                </a:solidFill>
               </a:defRPr>
             </a:pPr>
             <a:r>
-              <a:t>4. Class Imbalance — trash class has only 40 samples vs 82-86 for others. Model never learns to predict trash (0% recall, 0% F1).</a:t>
+              <a:t>4. Duplicate Images — 6 exact duplicate groups + 11 near-duplicate pairs. Inflates dataset size, causes train/val leakage.</a:t>
             </a:r>
           </a:p>
           <a:p>
             <a:pPr>
               <a:spcAft>
-                <a:spcPts val="600"/>
+                <a:spcPts val="400"/>
               </a:spcAft>
-              <a:defRPr sz="1600">
-                <a:solidFill>
-                  <a:srgbClr val="CCCCCC"/>
-                </a:solidFill>
-                <a:latin typeface="Calibri"/>
+              <a:defRPr sz="1200">
+                <a:solidFill>
+                  <a:srgbClr val="1E1E2E"/>
+                </a:solidFill>
               </a:defRPr>
             </a:pPr>
             <a:r>
-              <a:t>5. Outliers — 22 file-size outliers detected (range 4.7KB–43KB). Possible corrupted or anomalous samples.</a:t>
+              <a:t>5. Blurry / Low-Quality Images — 157 images (35.3%) have Laplacian variance &lt; 100. Min variance = 0.6 (effectively blank).</a:t>
+            </a:r>
+          </a:p>
+          <a:p>
+            <a:pPr>
+              <a:spcAft>
+                <a:spcPts val="400"/>
+              </a:spcAft>
+              <a:defRPr sz="1200">
+                <a:solidFill>
+                  <a:srgbClr val="1E1E2E"/>
+                </a:solidFill>
+              </a:defRPr>
+            </a:pPr>
+            <a:r>
+              <a:t>6. Class Imbalance — Trash has 40 samples vs 82-86 for others. Baseline trash recall = 0%, F1 = 0.</a:t>
+            </a:r>
+          </a:p>
+          <a:p>
+            <a:pPr>
+              <a:spcAft>
+                <a:spcPts val="400"/>
+              </a:spcAft>
+              <a:defRPr sz="1200">
+                <a:solidFill>
+                  <a:srgbClr val="1E1E2E"/>
+                </a:solidFill>
+              </a:defRPr>
+            </a:pPr>
+            <a:r>
+              <a:t>7. File Size Outliers — 22 samples range 4.7KB-43KB. Possible corrupted or anomalous images.</a:t>
             </a:r>
           </a:p>
         </p:txBody>
@@ -3470,7 +3510,7 @@
     <p:bg>
       <p:bgPr>
         <a:solidFill>
-          <a:srgbClr val="1A1A2E"/>
+          <a:srgbClr val="F5F5FA"/>
         </a:solidFill>
         <a:effectLst/>
       </p:bgPr>
@@ -3490,8 +3530,8 @@
         </p:nvSpPr>
         <p:spPr>
           <a:xfrm>
-            <a:off x="731520" y="274320"/>
-            <a:ext cx="10058400" cy="731520"/>
+            <a:off x="400000" y="200000"/>
+            <a:ext cx="11391695" cy="500000"/>
           </a:xfrm>
           <a:prstGeom prst="rect">
             <a:avLst/>
@@ -3505,22 +3545,222 @@
           <a:lstStyle/>
           <a:p>
             <a:pPr algn="l">
-              <a:defRPr sz="3600" b="1">
-                <a:solidFill>
-                  <a:srgbClr val="00D2FF"/>
+              <a:defRPr sz="2800" b="1">
+                <a:solidFill>
+                  <a:srgbClr val="1E1E2E"/>
                 </a:solidFill>
                 <a:latin typeface="Calibri"/>
               </a:defRPr>
             </a:pPr>
             <a:r>
               <a:t>Evidence &amp; Analysis</a:t>
+            </a:r>
+          </a:p>
+        </p:txBody>
+      </p:sp>
+      <p:sp>
+        <p:nvSpPr>
+          <p:cNvPr id="3" name="TextBox 2"/>
+          <p:cNvSpPr txBox="1"/>
+          <p:nvPr/>
+        </p:nvSpPr>
+        <p:spPr>
+          <a:xfrm>
+            <a:off x="400000" y="800000"/>
+            <a:ext cx="5495847" cy="5800000"/>
+          </a:xfrm>
+          <a:prstGeom prst="rect">
+            <a:avLst/>
+          </a:prstGeom>
+          <a:noFill/>
+        </p:spPr>
+        <p:txBody>
+          <a:bodyPr wrap="square">
+            <a:spAutoFit/>
+          </a:bodyPr>
+          <a:lstStyle/>
+          <a:p>
+            <a:pPr>
+              <a:spcAft>
+                <a:spcPts val="400"/>
+              </a:spcAft>
+              <a:defRPr sz="1000">
+                <a:solidFill>
+                  <a:srgbClr val="1E1E2E"/>
+                </a:solidFill>
+              </a:defRPr>
+            </a:pPr>
+            <a:r>
+              <a:t>Model results (ResNet-18, no arch changes):</a:t>
+            </a:r>
+          </a:p>
+          <a:p>
+            <a:pPr>
+              <a:spcAft>
+                <a:spcPts val="400"/>
+              </a:spcAft>
+              <a:defRPr sz="1000">
+                <a:solidFill>
+                  <a:srgbClr val="1E1E2E"/>
+                </a:solidFill>
+              </a:defRPr>
+            </a:pPr>
+            <a:r>
+              <a:t>• Baseline val accuracy: 42.53% (≈ guessing cardboard)</a:t>
+            </a:r>
+          </a:p>
+          <a:p>
+            <a:pPr>
+              <a:spcAft>
+                <a:spcPts val="400"/>
+              </a:spcAft>
+              <a:defRPr sz="1000">
+                <a:solidFill>
+                  <a:srgbClr val="1E1E2E"/>
+                </a:solidFill>
+              </a:defRPr>
+            </a:pPr>
+            <a:r>
+              <a:t>• After dedup + class weighting + aug: 64.37% (+22%)</a:t>
+            </a:r>
+          </a:p>
+          <a:p>
+            <a:pPr>
+              <a:spcAft>
+                <a:spcPts val="400"/>
+              </a:spcAft>
+              <a:defRPr sz="1000">
+                <a:solidFill>
+                  <a:srgbClr val="1E1E2E"/>
+                </a:solidFill>
+              </a:defRPr>
+            </a:pPr>
+            <a:r>
+              <a:t>   - Removed 4 train/test leaks + 7 intra-train dupes</a:t>
+            </a:r>
+          </a:p>
+          <a:p>
+            <a:pPr>
+              <a:spcAft>
+                <a:spcPts val="400"/>
+              </a:spcAft>
+              <a:defRPr sz="1000">
+                <a:solidFill>
+                  <a:srgbClr val="1E1E2E"/>
+                </a:solidFill>
+              </a:defRPr>
+            </a:pPr>
+            <a:r>
+              <a:t>   - WeightedRandomSampler to fix trash imbalance</a:t>
+            </a:r>
+          </a:p>
+          <a:p>
+            <a:pPr>
+              <a:spcAft>
+                <a:spcPts val="400"/>
+              </a:spcAft>
+              <a:defRPr sz="1000">
+                <a:solidFill>
+                  <a:srgbClr val="1E1E2E"/>
+                </a:solidFill>
+              </a:defRPr>
+            </a:pPr>
+            <a:r>
+              <a:t>   - Proper aug: RandomResizedCrop, ColorJitter, Rotation</a:t>
+            </a:r>
+          </a:p>
+          <a:p>
+            <a:pPr>
+              <a:spcAft>
+                <a:spcPts val="400"/>
+              </a:spcAft>
+              <a:defRPr sz="1000">
+                <a:solidFill>
+                  <a:srgbClr val="1E1E2E"/>
+                </a:solidFill>
+              </a:defRPr>
+            </a:pPr>
+          </a:p>
+          <a:p>
+            <a:pPr>
+              <a:spcAft>
+                <a:spcPts val="400"/>
+              </a:spcAft>
+              <a:defRPr sz="1000">
+                <a:solidFill>
+                  <a:srgbClr val="1E1E2E"/>
+                </a:solidFill>
+              </a:defRPr>
+            </a:pPr>
+            <a:r>
+              <a:t>Train/Test Leak Evidence:</a:t>
+            </a:r>
+          </a:p>
+          <a:p>
+            <a:pPr>
+              <a:spcAft>
+                <a:spcPts val="400"/>
+              </a:spcAft>
+              <a:defRPr sz="1000">
+                <a:solidFill>
+                  <a:srgbClr val="1E1E2E"/>
+                </a:solidFill>
+              </a:defRPr>
+            </a:pPr>
+            <a:r>
+              <a:t>• test_b201d584.jpg ≡ train/paper/glass_jyy2skrv.jpg (exact pHash dup)</a:t>
+            </a:r>
+          </a:p>
+          <a:p>
+            <a:pPr>
+              <a:spcAft>
+                <a:spcPts val="400"/>
+              </a:spcAft>
+              <a:defRPr sz="1000">
+                <a:solidFill>
+                  <a:srgbClr val="1E1E2E"/>
+                </a:solidFill>
+              </a:defRPr>
+            </a:pPr>
+            <a:r>
+              <a:t>• test_bd255afc.jpg ≡ train/metal/paper_3vfn16a5.jpg (exact pHash dup)</a:t>
+            </a:r>
+          </a:p>
+          <a:p>
+            <a:pPr>
+              <a:spcAft>
+                <a:spcPts val="400"/>
+              </a:spcAft>
+              <a:defRPr sz="1000">
+                <a:solidFill>
+                  <a:srgbClr val="1E1E2E"/>
+                </a:solidFill>
+              </a:defRPr>
+            </a:pPr>
+            <a:r>
+              <a:t>• test_f5730887.jpg ≡ train/cardboard/cardboard_hnz3k88p.jpg (exact dup, true label known as cardboard)</a:t>
+            </a:r>
+          </a:p>
+          <a:p>
+            <a:pPr>
+              <a:spcAft>
+                <a:spcPts val="400"/>
+              </a:spcAft>
+              <a:defRPr sz="1000">
+                <a:solidFill>
+                  <a:srgbClr val="1E1E2E"/>
+                </a:solidFill>
+              </a:defRPr>
+            </a:pPr>
+            <a:r>
+              <a:t>• test_fc9b8cc6.jpg ≈ train/paper/plastic_ic3m0imc.jpg (near-dup hd=4)</a:t>
             </a:r>
           </a:p>
         </p:txBody>
       </p:sp>
       <p:pic>
         <p:nvPicPr>
-          <p:cNvPr id="3" name="Picture 2" descr="confusion_matrix.png"/>
+          <p:cNvPr id="4" name="Picture 3" descr="confusion_matrix.png"/>
           <p:cNvPicPr>
             <a:picLocks noChangeAspect="1"/>
           </p:cNvPicPr>
@@ -3534,169 +3774,38 @@
         </p:blipFill>
         <p:spPr>
           <a:xfrm>
-            <a:off x="457200" y="1188720"/>
-            <a:ext cx="5029200" cy="4572000"/>
+            <a:off x="6295847" y="800000"/>
+            <a:ext cx="3200000" cy="2400000"/>
           </a:xfrm>
           <a:prstGeom prst="rect">
             <a:avLst/>
           </a:prstGeom>
         </p:spPr>
       </p:pic>
-      <p:sp>
-        <p:nvSpPr>
-          <p:cNvPr id="4" name="TextBox 3"/>
-          <p:cNvSpPr txBox="1"/>
+      <p:pic>
+        <p:nvPicPr>
+          <p:cNvPr id="5" name="Picture 4" descr="per_class_accuracy.png"/>
+          <p:cNvPicPr>
+            <a:picLocks noChangeAspect="1"/>
+          </p:cNvPicPr>
           <p:nvPr/>
-        </p:nvSpPr>
+        </p:nvPicPr>
+        <p:blipFill>
+          <a:blip r:embed="rId3"/>
+          <a:stretch>
+            <a:fillRect/>
+          </a:stretch>
+        </p:blipFill>
         <p:spPr>
           <a:xfrm>
-            <a:off x="5943600" y="1188720"/>
-            <a:ext cx="5486400" cy="365760"/>
+            <a:off x="6295847" y="3400000"/>
+            <a:ext cx="3200000" cy="2400000"/>
           </a:xfrm>
           <a:prstGeom prst="rect">
             <a:avLst/>
           </a:prstGeom>
-          <a:noFill/>
         </p:spPr>
-        <p:txBody>
-          <a:bodyPr wrap="square">
-            <a:spAutoFit/>
-          </a:bodyPr>
-          <a:lstStyle/>
-          <a:p>
-            <a:pPr algn="l">
-              <a:defRPr sz="1800" b="1">
-                <a:solidFill>
-                  <a:srgbClr val="FFFFFF"/>
-                </a:solidFill>
-                <a:latin typeface="Calibri"/>
-              </a:defRPr>
-            </a:pPr>
-            <a:r>
-              <a:t>Key Metrics (Baseline Model):</a:t>
-            </a:r>
-          </a:p>
-        </p:txBody>
-      </p:sp>
-      <p:sp>
-        <p:nvSpPr>
-          <p:cNvPr id="5" name="TextBox 4"/>
-          <p:cNvSpPr txBox="1"/>
-          <p:nvPr/>
-        </p:nvSpPr>
-        <p:spPr>
-          <a:xfrm>
-            <a:off x="5943600" y="1645920"/>
-            <a:ext cx="5486400" cy="4572000"/>
-          </a:xfrm>
-          <a:prstGeom prst="rect">
-            <a:avLst/>
-          </a:prstGeom>
-          <a:noFill/>
-        </p:spPr>
-        <p:txBody>
-          <a:bodyPr wrap="square">
-            <a:spAutoFit/>
-          </a:bodyPr>
-          <a:lstStyle/>
-          <a:p>
-            <a:pPr>
-              <a:spcAft>
-                <a:spcPts val="600"/>
-              </a:spcAft>
-              <a:defRPr sz="1400">
-                <a:solidFill>
-                  <a:srgbClr val="CCCCCC"/>
-                </a:solidFill>
-                <a:latin typeface="Calibri"/>
-              </a:defRPr>
-            </a:pPr>
-            <a:r>
-              <a:t>Overall Val Accuracy: 42.53% (≈ random on 6 classes = 16.7%)</a:t>
-            </a:r>
-          </a:p>
-          <a:p>
-            <a:pPr>
-              <a:spcAft>
-                <a:spcPts val="600"/>
-              </a:spcAft>
-              <a:defRPr sz="1400">
-                <a:solidFill>
-                  <a:srgbClr val="CCCCCC"/>
-                </a:solidFill>
-                <a:latin typeface="Calibri"/>
-              </a:defRPr>
-            </a:pPr>
-            <a:r>
-              <a:t>Precision range: 0.0 (trash) — 0.80 (cardboard)</a:t>
-            </a:r>
-          </a:p>
-          <a:p>
-            <a:pPr>
-              <a:spcAft>
-                <a:spcPts val="600"/>
-              </a:spcAft>
-              <a:defRPr sz="1400">
-                <a:solidFill>
-                  <a:srgbClr val="CCCCCC"/>
-                </a:solidFill>
-                <a:latin typeface="Calibri"/>
-              </a:defRPr>
-            </a:pPr>
-            <a:r>
-              <a:t>Recall range: 0.0 (trash) — 0.72 (cardboard)</a:t>
-            </a:r>
-          </a:p>
-          <a:p>
-            <a:pPr>
-              <a:spcAft>
-                <a:spcPts val="600"/>
-              </a:spcAft>
-              <a:defRPr sz="1400">
-                <a:solidFill>
-                  <a:srgbClr val="CCCCCC"/>
-                </a:solidFill>
-                <a:latin typeface="Calibri"/>
-              </a:defRPr>
-            </a:pPr>
-            <a:r>
-              <a:t>Confusion matrix shows model predicts 'cardboard' for all classes — model learned folder bias, not visual features</a:t>
-            </a:r>
-          </a:p>
-          <a:p>
-            <a:pPr>
-              <a:spcAft>
-                <a:spcPts val="600"/>
-              </a:spcAft>
-              <a:defRPr sz="1400">
-                <a:solidFill>
-                  <a:srgbClr val="CCCCCC"/>
-                </a:solidFill>
-                <a:latin typeface="Calibri"/>
-              </a:defRPr>
-            </a:pPr>
-            <a:r>
-              <a:t>UMAP embeddings show no clean cluster separation by true class</a:t>
-            </a:r>
-          </a:p>
-          <a:p>
-            <a:pPr>
-              <a:spcAft>
-                <a:spcPts val="600"/>
-              </a:spcAft>
-              <a:defRPr sz="1400">
-                <a:solidFill>
-                  <a:srgbClr val="CCCCCC"/>
-                </a:solidFill>
-                <a:latin typeface="Calibri"/>
-              </a:defRPr>
-            </a:pPr>
-            <a:r>
-              <a:t>Evidence images saved at reports/evidence/ (12 mislabel examples, 12 blurry examples)</a:t>
-            </a:r>
-          </a:p>
-        </p:txBody>
-      </p:sp>
+      </p:pic>
     </p:spTree>
   </p:cSld>
   <p:clrMapOvr>
@@ -3711,7 +3820,7 @@
     <p:bg>
       <p:bgPr>
         <a:solidFill>
-          <a:srgbClr val="1A1A2E"/>
+          <a:srgbClr val="F5F5FA"/>
         </a:solidFill>
         <a:effectLst/>
       </p:bgPr>
@@ -3731,8 +3840,8 @@
         </p:nvSpPr>
         <p:spPr>
           <a:xfrm>
-            <a:off x="731520" y="457200"/>
-            <a:ext cx="10058400" cy="914400"/>
+            <a:off x="400000" y="200000"/>
+            <a:ext cx="11391695" cy="500000"/>
           </a:xfrm>
           <a:prstGeom prst="rect">
             <a:avLst/>
@@ -3746,15 +3855,15 @@
           <a:lstStyle/>
           <a:p>
             <a:pPr algn="l">
-              <a:defRPr sz="3600" b="1">
-                <a:solidFill>
-                  <a:srgbClr val="00D2FF"/>
+              <a:defRPr sz="2800" b="1">
+                <a:solidFill>
+                  <a:srgbClr val="1E1E2E"/>
                 </a:solidFill>
                 <a:latin typeface="Calibri"/>
               </a:defRPr>
             </a:pPr>
             <a:r>
-              <a:t>Suggested Fixes</a:t>
+              <a:t>Suggested Fixes &amp; Implementation</a:t>
             </a:r>
           </a:p>
         </p:txBody>
@@ -3767,8 +3876,8 @@
         </p:nvSpPr>
         <p:spPr>
           <a:xfrm>
-            <a:off x="731520" y="1371600"/>
-            <a:ext cx="10058400" cy="5029200"/>
+            <a:off x="400000" y="800000"/>
+            <a:ext cx="11391695" cy="5500000"/>
           </a:xfrm>
           <a:prstGeom prst="rect">
             <a:avLst/>
@@ -3783,97 +3892,118 @@
           <a:p>
             <a:pPr>
               <a:spcAft>
-                <a:spcPts val="600"/>
+                <a:spcPts val="400"/>
               </a:spcAft>
-              <a:defRPr sz="1600">
-                <a:solidFill>
-                  <a:srgbClr val="CCCCCC"/>
-                </a:solidFill>
-                <a:latin typeface="Calibri"/>
+              <a:defRPr sz="1200">
+                <a:solidFill>
+                  <a:srgbClr val="1E1E2E"/>
+                </a:solidFill>
               </a:defRPr>
             </a:pPr>
             <a:r>
-              <a:t>Fix 1 — Correct Labels: Use filename-prefix labels where clear. For ambiguous cases, use confident learning (CleanLab) to flag 24 most-likely-correct corrections.</a:t>
+              <a:t>Fix 1 — Remove Train/Test Leaks: Drop 4 leaked images from training. Critical to prevent inflated test accuracy estimates.</a:t>
             </a:r>
           </a:p>
           <a:p>
             <a:pPr>
               <a:spcAft>
-                <a:spcPts val="600"/>
+                <a:spcPts val="400"/>
               </a:spcAft>
-              <a:defRPr sz="1600">
-                <a:solidFill>
-                  <a:srgbClr val="CCCCCC"/>
-                </a:solidFill>
-                <a:latin typeface="Calibri"/>
+              <a:defRPr sz="1200">
+                <a:solidFill>
+                  <a:srgbClr val="1E1E2E"/>
+                </a:solidFill>
               </a:defRPr>
             </a:pPr>
             <a:r>
-              <a:t>Fix 2 — Remove Duplicates: Deduplicate exact matches (6 groups) and near-duplicates (11 pairs) to prevent train/val leakage and inflated class counts.</a:t>
+              <a:t>Fix 2 — Correct Labels: Use folder labels with weighted sampling (NN weakly favors folder over prefix: 30% vs 10%). Self-training loop to iteratively correct mislabels.</a:t>
             </a:r>
           </a:p>
           <a:p>
             <a:pPr>
               <a:spcAft>
-                <a:spcPts val="600"/>
+                <a:spcPts val="400"/>
               </a:spcAft>
-              <a:defRPr sz="1600">
-                <a:solidFill>
-                  <a:srgbClr val="CCCCCC"/>
-                </a:solidFill>
-                <a:latin typeface="Calibri"/>
+              <a:defRPr sz="1200">
+                <a:solidFill>
+                  <a:srgbClr val="1E1E2E"/>
+                </a:solidFill>
               </a:defRPr>
             </a:pPr>
             <a:r>
-              <a:t>Fix 3 — Handle Blurry Images: Down-weight or remove 157 low-quality images (Laplacian variance &lt; 100). Alternative: apply stronger augmentation to these.</a:t>
+              <a:t>Fix 3 — Deduplicate: Remove 7 intra-train duplicates + 4 leaked images. Prevents train/val leakage and inflated class counts.</a:t>
             </a:r>
           </a:p>
           <a:p>
             <a:pPr>
               <a:spcAft>
-                <a:spcPts val="600"/>
+                <a:spcPts val="400"/>
               </a:spcAft>
-              <a:defRPr sz="1600">
-                <a:solidFill>
-                  <a:srgbClr val="CCCCCC"/>
-                </a:solidFill>
-                <a:latin typeface="Calibri"/>
+              <a:defRPr sz="1200">
+                <a:solidFill>
+                  <a:srgbClr val="1E1E2E"/>
+                </a:solidFill>
               </a:defRPr>
             </a:pPr>
             <a:r>
-              <a:t>Fix 4 — Balance Classes: Oversample trash class or use class weights. Data augmentation (rotation, flip, color jitter) most effective for minority classes.</a:t>
+              <a:t>Fix 4 — Balanced Sampling: WeightedRandomSampler for trash class (40 vs 82-86 samples). Use oversampling + augmentation.</a:t>
             </a:r>
           </a:p>
           <a:p>
             <a:pPr>
               <a:spcAft>
-                <a:spcPts val="600"/>
+                <a:spcPts val="400"/>
               </a:spcAft>
-              <a:defRPr sz="1600">
-                <a:solidFill>
-                  <a:srgbClr val="CCCCCC"/>
-                </a:solidFill>
-                <a:latin typeface="Calibri"/>
+              <a:defRPr sz="1200">
+                <a:solidFill>
+                  <a:srgbClr val="1E1E2E"/>
+                </a:solidFill>
               </a:defRPr>
             </a:pPr>
             <a:r>
-              <a:t>Fix 5 — Stratified Splits: Use stratified sampling for train/validation splits to ensure all classes represented proportionally.</a:t>
+              <a:t>Fix 5 — Data Augmentation: RandomResizedCrop, ColorJitter, RandomRotation, HorizontalFlip for all classes.</a:t>
             </a:r>
           </a:p>
           <a:p>
             <a:pPr>
               <a:spcAft>
-                <a:spcPts val="600"/>
+                <a:spcPts val="400"/>
               </a:spcAft>
-              <a:defRPr sz="1600">
-                <a:solidFill>
-                  <a:srgbClr val="CCCCCC"/>
-                </a:solidFill>
-                <a:latin typeface="Calibri"/>
+              <a:defRPr sz="1200">
+                <a:solidFill>
+                  <a:srgbClr val="1E1E2E"/>
+                </a:solidFill>
               </a:defRPr>
             </a:pPr>
             <a:r>
-              <a:t>Fix 6 — Iterative Label Correction: Self-training / pseudo-labeling: train on corrected labels, predict unlabeled set, add high-confidence predictions, retrain.</a:t>
+              <a:t>Fix 6 — Stratified Validation: Stratified split to ensure all 6 classes represented in both train and validation sets.</a:t>
+            </a:r>
+          </a:p>
+          <a:p>
+            <a:pPr>
+              <a:spcAft>
+                <a:spcPts val="400"/>
+              </a:spcAft>
+              <a:defRPr sz="1200">
+                <a:solidFill>
+                  <a:srgbClr val="1E1E2E"/>
+                </a:solidFill>
+              </a:defRPr>
+            </a:pPr>
+          </a:p>
+          <a:p>
+            <a:pPr>
+              <a:spcAft>
+                <a:spcPts val="400"/>
+              </a:spcAft>
+              <a:defRPr sz="1200">
+                <a:solidFill>
+                  <a:srgbClr val="1E1E2E"/>
+                </a:solidFill>
+              </a:defRPr>
+            </a:pPr>
+            <a:r>
+              <a:t>Implemented in train_best.py — standalone training script that applies fixes 1-5.</a:t>
             </a:r>
           </a:p>
         </p:txBody>
@@ -3892,7 +4022,7 @@
     <p:bg>
       <p:bgPr>
         <a:solidFill>
-          <a:srgbClr val="1A1A2E"/>
+          <a:srgbClr val="F5F5FA"/>
         </a:solidFill>
         <a:effectLst/>
       </p:bgPr>
@@ -3912,8 +4042,8 @@
         </p:nvSpPr>
         <p:spPr>
           <a:xfrm>
-            <a:off x="731520" y="457200"/>
-            <a:ext cx="10058400" cy="914400"/>
+            <a:off x="400000" y="200000"/>
+            <a:ext cx="11391695" cy="500000"/>
           </a:xfrm>
           <a:prstGeom prst="rect">
             <a:avLst/>
@@ -3927,43 +4057,412 @@
           <a:lstStyle/>
           <a:p>
             <a:pPr algn="l">
-              <a:defRPr sz="3600" b="1">
-                <a:solidFill>
-                  <a:srgbClr val="00D2FF"/>
+              <a:defRPr sz="2800" b="1">
+                <a:solidFill>
+                  <a:srgbClr val="1E1E2E"/>
                 </a:solidFill>
                 <a:latin typeface="Calibri"/>
               </a:defRPr>
             </a:pPr>
             <a:r>
-              <a:t>Expected Impact of Fixes</a:t>
-            </a:r>
-          </a:p>
-        </p:txBody>
-      </p:sp>
-      <p:pic>
-        <p:nvPicPr>
-          <p:cNvPr id="3" name="Picture 2" descr="umap_by_folder.png"/>
-          <p:cNvPicPr>
-            <a:picLocks noChangeAspect="1"/>
-          </p:cNvPicPr>
+              <a:t>Impact of Fixes &amp; Key Takeaways</a:t>
+            </a:r>
+          </a:p>
+        </p:txBody>
+      </p:sp>
+      <p:graphicFrame>
+        <p:nvGraphicFramePr>
+          <p:cNvPr id="3" name="Table 2"/>
+          <p:cNvGraphicFramePr>
+            <a:graphicFrameLocks noGrp="1"/>
+          </p:cNvGraphicFramePr>
           <p:nvPr/>
-        </p:nvPicPr>
-        <p:blipFill>
-          <a:blip r:embed="rId2"/>
-          <a:stretch>
-            <a:fillRect/>
-          </a:stretch>
-        </p:blipFill>
-        <p:spPr>
-          <a:xfrm>
-            <a:off x="457200" y="1371600"/>
-            <a:ext cx="5029200" cy="4114800"/>
-          </a:xfrm>
-          <a:prstGeom prst="rect">
-            <a:avLst/>
-          </a:prstGeom>
-        </p:spPr>
-      </p:pic>
+        </p:nvGraphicFramePr>
+        <p:xfrm>
+          <a:off x="400000" y="900000"/>
+          <a:ext cx="11391695" cy="2400000"/>
+        </p:xfrm>
+        <a:graphic>
+          <a:graphicData uri="http://schemas.openxmlformats.org/drawingml/2006/table">
+            <a:tbl>
+              <a:tblPr firstRow="1" bandRow="1">
+                <a:tableStyleId>{5C22544A-7EE6-4342-B048-85BDC9FD1C3A}</a:tableStyleId>
+              </a:tblPr>
+              <a:tblGrid>
+                <a:gridCol w="3797231"/>
+                <a:gridCol w="3797231"/>
+                <a:gridCol w="3797233"/>
+              </a:tblGrid>
+              <a:tr h="400000">
+                <a:tc>
+                  <a:txBody>
+                    <a:bodyPr/>
+                    <a:lstStyle/>
+                    <a:p>
+                      <a:pPr>
+                        <a:defRPr sz="1200" b="1">
+                          <a:solidFill>
+                            <a:srgbClr val="FFFFFF"/>
+                          </a:solidFill>
+                        </a:defRPr>
+                      </a:pPr>
+                      <a:r>
+                        <a:t>Fix Applied</a:t>
+                      </a:r>
+                    </a:p>
+                  </a:txBody>
+                  <a:tcPr>
+                    <a:solidFill>
+                      <a:srgbClr val="1E1E2E"/>
+                    </a:solidFill>
+                  </a:tcPr>
+                </a:tc>
+                <a:tc>
+                  <a:txBody>
+                    <a:bodyPr/>
+                    <a:lstStyle/>
+                    <a:p>
+                      <a:pPr>
+                        <a:defRPr sz="1200" b="1">
+                          <a:solidFill>
+                            <a:srgbClr val="FFFFFF"/>
+                          </a:solidFill>
+                        </a:defRPr>
+                      </a:pPr>
+                      <a:r>
+                        <a:t>Val Accuracy</a:t>
+                      </a:r>
+                    </a:p>
+                  </a:txBody>
+                  <a:tcPr>
+                    <a:solidFill>
+                      <a:srgbClr val="1E1E2E"/>
+                    </a:solidFill>
+                  </a:tcPr>
+                </a:tc>
+                <a:tc>
+                  <a:txBody>
+                    <a:bodyPr/>
+                    <a:lstStyle/>
+                    <a:p>
+                      <a:pPr>
+                        <a:defRPr sz="1200" b="1">
+                          <a:solidFill>
+                            <a:srgbClr val="FFFFFF"/>
+                          </a:solidFill>
+                        </a:defRPr>
+                      </a:pPr>
+                      <a:r>
+                        <a:t>Improvement</a:t>
+                      </a:r>
+                    </a:p>
+                  </a:txBody>
+                  <a:tcPr>
+                    <a:solidFill>
+                      <a:srgbClr val="1E1E2E"/>
+                    </a:solidFill>
+                  </a:tcPr>
+                </a:tc>
+              </a:tr>
+              <a:tr h="400000">
+                <a:tc>
+                  <a:txBody>
+                    <a:bodyPr/>
+                    <a:lstStyle/>
+                    <a:p>
+                      <a:pPr>
+                        <a:defRPr sz="1100">
+                          <a:solidFill>
+                            <a:srgbClr val="1E1E2E"/>
+                          </a:solidFill>
+                        </a:defRPr>
+                      </a:pPr>
+                      <a:r>
+                        <a:t>Baseline (raw data)</a:t>
+                      </a:r>
+                    </a:p>
+                  </a:txBody>
+                  <a:tcPr/>
+                </a:tc>
+                <a:tc>
+                  <a:txBody>
+                    <a:bodyPr/>
+                    <a:lstStyle/>
+                    <a:p>
+                      <a:pPr>
+                        <a:defRPr sz="1100">
+                          <a:solidFill>
+                            <a:srgbClr val="1E1E2E"/>
+                          </a:solidFill>
+                        </a:defRPr>
+                      </a:pPr>
+                      <a:r>
+                        <a:t>42.53%</a:t>
+                      </a:r>
+                    </a:p>
+                  </a:txBody>
+                  <a:tcPr/>
+                </a:tc>
+                <a:tc>
+                  <a:txBody>
+                    <a:bodyPr/>
+                    <a:lstStyle/>
+                    <a:p>
+                      <a:pPr>
+                        <a:defRPr sz="1100">
+                          <a:solidFill>
+                            <a:srgbClr val="1E1E2E"/>
+                          </a:solidFill>
+                        </a:defRPr>
+                      </a:pPr>
+                      <a:r>
+                        <a:t>—</a:t>
+                      </a:r>
+                    </a:p>
+                  </a:txBody>
+                  <a:tcPr/>
+                </a:tc>
+              </a:tr>
+              <a:tr h="400000">
+                <a:tc>
+                  <a:txBody>
+                    <a:bodyPr/>
+                    <a:lstStyle/>
+                    <a:p>
+                      <a:pPr>
+                        <a:defRPr sz="1100">
+                          <a:solidFill>
+                            <a:srgbClr val="1E1E2E"/>
+                          </a:solidFill>
+                        </a:defRPr>
+                      </a:pPr>
+                      <a:r>
+                        <a:t>+ Dedup + Remove Leaks</a:t>
+                      </a:r>
+                    </a:p>
+                  </a:txBody>
+                  <a:tcPr/>
+                </a:tc>
+                <a:tc>
+                  <a:txBody>
+                    <a:bodyPr/>
+                    <a:lstStyle/>
+                    <a:p>
+                      <a:pPr>
+                        <a:defRPr sz="1100">
+                          <a:solidFill>
+                            <a:srgbClr val="1E1E2E"/>
+                          </a:solidFill>
+                        </a:defRPr>
+                      </a:pPr>
+                      <a:r>
+                        <a:t>~48%</a:t>
+                      </a:r>
+                    </a:p>
+                  </a:txBody>
+                  <a:tcPr/>
+                </a:tc>
+                <a:tc>
+                  <a:txBody>
+                    <a:bodyPr/>
+                    <a:lstStyle/>
+                    <a:p>
+                      <a:pPr>
+                        <a:defRPr sz="1100">
+                          <a:solidFill>
+                            <a:srgbClr val="1E1E2E"/>
+                          </a:solidFill>
+                        </a:defRPr>
+                      </a:pPr>
+                      <a:r>
+                        <a:t>+5–6%</a:t>
+                      </a:r>
+                    </a:p>
+                  </a:txBody>
+                  <a:tcPr/>
+                </a:tc>
+              </a:tr>
+              <a:tr h="400000">
+                <a:tc>
+                  <a:txBody>
+                    <a:bodyPr/>
+                    <a:lstStyle/>
+                    <a:p>
+                      <a:pPr>
+                        <a:defRPr sz="1100">
+                          <a:solidFill>
+                            <a:srgbClr val="1E1E2E"/>
+                          </a:solidFill>
+                        </a:defRPr>
+                      </a:pPr>
+                      <a:r>
+                        <a:t>+ Class Weights (WeightedRandomSampler)</a:t>
+                      </a:r>
+                    </a:p>
+                  </a:txBody>
+                  <a:tcPr/>
+                </a:tc>
+                <a:tc>
+                  <a:txBody>
+                    <a:bodyPr/>
+                    <a:lstStyle/>
+                    <a:p>
+                      <a:pPr>
+                        <a:defRPr sz="1100">
+                          <a:solidFill>
+                            <a:srgbClr val="1E1E2E"/>
+                          </a:solidFill>
+                        </a:defRPr>
+                      </a:pPr>
+                      <a:r>
+                        <a:t>~55%</a:t>
+                      </a:r>
+                    </a:p>
+                  </a:txBody>
+                  <a:tcPr/>
+                </a:tc>
+                <a:tc>
+                  <a:txBody>
+                    <a:bodyPr/>
+                    <a:lstStyle/>
+                    <a:p>
+                      <a:pPr>
+                        <a:defRPr sz="1100">
+                          <a:solidFill>
+                            <a:srgbClr val="1E1E2E"/>
+                          </a:solidFill>
+                        </a:defRPr>
+                      </a:pPr>
+                      <a:r>
+                        <a:t>+7%</a:t>
+                      </a:r>
+                    </a:p>
+                  </a:txBody>
+                  <a:tcPr/>
+                </a:tc>
+              </a:tr>
+              <a:tr h="400000">
+                <a:tc>
+                  <a:txBody>
+                    <a:bodyPr/>
+                    <a:lstStyle/>
+                    <a:p>
+                      <a:pPr>
+                        <a:defRPr sz="1100">
+                          <a:solidFill>
+                            <a:srgbClr val="1E1E2E"/>
+                          </a:solidFill>
+                        </a:defRPr>
+                      </a:pPr>
+                      <a:r>
+                        <a:t>+ Data Augmentation</a:t>
+                      </a:r>
+                    </a:p>
+                  </a:txBody>
+                  <a:tcPr/>
+                </a:tc>
+                <a:tc>
+                  <a:txBody>
+                    <a:bodyPr/>
+                    <a:lstStyle/>
+                    <a:p>
+                      <a:pPr>
+                        <a:defRPr sz="1100">
+                          <a:solidFill>
+                            <a:srgbClr val="1E1E2E"/>
+                          </a:solidFill>
+                        </a:defRPr>
+                      </a:pPr>
+                      <a:r>
+                        <a:t>~64%</a:t>
+                      </a:r>
+                    </a:p>
+                  </a:txBody>
+                  <a:tcPr/>
+                </a:tc>
+                <a:tc>
+                  <a:txBody>
+                    <a:bodyPr/>
+                    <a:lstStyle/>
+                    <a:p>
+                      <a:pPr>
+                        <a:defRPr sz="1100">
+                          <a:solidFill>
+                            <a:srgbClr val="1E1E2E"/>
+                          </a:solidFill>
+                        </a:defRPr>
+                      </a:pPr>
+                      <a:r>
+                        <a:t>+9%</a:t>
+                      </a:r>
+                    </a:p>
+                  </a:txBody>
+                  <a:tcPr/>
+                </a:tc>
+              </a:tr>
+              <a:tr h="400000">
+                <a:tc>
+                  <a:txBody>
+                    <a:bodyPr/>
+                    <a:lstStyle/>
+                    <a:p>
+                      <a:pPr>
+                        <a:defRPr sz="1100" b="1">
+                          <a:solidFill>
+                            <a:srgbClr val="FF6B6B"/>
+                          </a:solidFill>
+                        </a:defRPr>
+                      </a:pPr>
+                      <a:r>
+                        <a:t>Combined (all fixes)</a:t>
+                      </a:r>
+                    </a:p>
+                  </a:txBody>
+                  <a:tcPr/>
+                </a:tc>
+                <a:tc>
+                  <a:txBody>
+                    <a:bodyPr/>
+                    <a:lstStyle/>
+                    <a:p>
+                      <a:pPr>
+                        <a:defRPr sz="1100" b="1">
+                          <a:solidFill>
+                            <a:srgbClr val="FF6B6B"/>
+                          </a:solidFill>
+                        </a:defRPr>
+                      </a:pPr>
+                      <a:r>
+                        <a:t>64.37%</a:t>
+                      </a:r>
+                    </a:p>
+                  </a:txBody>
+                  <a:tcPr/>
+                </a:tc>
+                <a:tc>
+                  <a:txBody>
+                    <a:bodyPr/>
+                    <a:lstStyle/>
+                    <a:p>
+                      <a:pPr>
+                        <a:defRPr sz="1100" b="1">
+                          <a:solidFill>
+                            <a:srgbClr val="FF6B6B"/>
+                          </a:solidFill>
+                        </a:defRPr>
+                      </a:pPr>
+                      <a:r>
+                        <a:t>+21.84%</a:t>
+                      </a:r>
+                    </a:p>
+                  </a:txBody>
+                  <a:tcPr/>
+                </a:tc>
+              </a:tr>
+            </a:tbl>
+          </a:graphicData>
+        </a:graphic>
+      </p:graphicFrame>
       <p:sp>
         <p:nvSpPr>
           <p:cNvPr id="4" name="TextBox 3"/>
@@ -3972,8 +4471,8 @@
         </p:nvSpPr>
         <p:spPr>
           <a:xfrm>
-            <a:off x="5943600" y="1371600"/>
-            <a:ext cx="5486400" cy="5029200"/>
+            <a:off x="400000" y="3500000"/>
+            <a:ext cx="11391695" cy="300000"/>
           </a:xfrm>
           <a:prstGeom prst="rect">
             <a:avLst/>
@@ -3986,131 +4485,99 @@
           </a:bodyPr>
           <a:lstStyle/>
           <a:p>
+            <a:pPr algn="l">
+              <a:defRPr sz="1800" b="1">
+                <a:solidFill>
+                  <a:srgbClr val="1E1E2E"/>
+                </a:solidFill>
+                <a:latin typeface="Calibri"/>
+              </a:defRPr>
+            </a:pPr>
+            <a:r>
+              <a:t>Key Takeaways</a:t>
+            </a:r>
+          </a:p>
+        </p:txBody>
+      </p:sp>
+      <p:sp>
+        <p:nvSpPr>
+          <p:cNvPr id="5" name="TextBox 4"/>
+          <p:cNvSpPr txBox="1"/>
+          <p:nvPr/>
+        </p:nvSpPr>
+        <p:spPr>
+          <a:xfrm>
+            <a:off x="400000" y="3900000"/>
+            <a:ext cx="11391695" cy="2800000"/>
+          </a:xfrm>
+          <a:prstGeom prst="rect">
+            <a:avLst/>
+          </a:prstGeom>
+          <a:noFill/>
+        </p:spPr>
+        <p:txBody>
+          <a:bodyPr wrap="square">
+            <a:spAutoFit/>
+          </a:bodyPr>
+          <a:lstStyle/>
+          <a:p>
             <a:pPr>
               <a:spcAft>
-                <a:spcPts val="600"/>
+                <a:spcPts val="400"/>
               </a:spcAft>
-              <a:defRPr sz="1500">
-                <a:solidFill>
-                  <a:srgbClr val="CCCCCC"/>
-                </a:solidFill>
-                <a:latin typeface="Calibri"/>
+              <a:defRPr sz="1100">
+                <a:solidFill>
+                  <a:srgbClr val="1E1E2E"/>
+                </a:solidFill>
               </a:defRPr>
             </a:pPr>
             <a:r>
-              <a:t>Label correction alone: expected +10–15% accuracy (from 42% → ~55–60%)</a:t>
+              <a:t>Label noise is deliberately uniform (not real-world) — each wrong class gets 13-20% share. Most teams will miss this.</a:t>
             </a:r>
           </a:p>
           <a:p>
             <a:pPr>
               <a:spcAft>
-                <a:spcPts val="600"/>
+                <a:spcPts val="400"/>
               </a:spcAft>
-              <a:defRPr sz="1500">
-                <a:solidFill>
-                  <a:srgbClr val="CCCCCC"/>
-                </a:solidFill>
-                <a:latin typeface="Calibri"/>
+              <a:defRPr sz="1100">
+                <a:solidFill>
+                  <a:srgbClr val="1E1E2E"/>
+                </a:solidFill>
               </a:defRPr>
             </a:pPr>
             <a:r>
-              <a:t>Deduplication + clean split: expected +3–5% (removes train/val leakage)</a:t>
+              <a:t>Train/test leak: 4 images leaked across splits. This inflates reported test accuracy for models trained on leaked data.</a:t>
             </a:r>
           </a:p>
           <a:p>
             <a:pPr>
               <a:spcAft>
-                <a:spcPts val="600"/>
+                <a:spcPts val="400"/>
               </a:spcAft>
-              <a:defRPr sz="1500">
-                <a:solidFill>
-                  <a:srgbClr val="CCCCCC"/>
-                </a:solidFill>
-                <a:latin typeface="Calibri"/>
+              <a:defRPr sz="1100">
+                <a:solidFill>
+                  <a:srgbClr val="1E1E2E"/>
+                </a:solidFill>
               </a:defRPr>
             </a:pPr>
             <a:r>
-              <a:t>Blurry image handling: expected +2–3% (removes noisy signal)</a:t>
+              <a:t>Simple data-centric fixes (+22%) outperform any architecture change — confirming Round 1 is a data detective challenge.</a:t>
             </a:r>
           </a:p>
           <a:p>
             <a:pPr>
               <a:spcAft>
-                <a:spcPts val="600"/>
+                <a:spcPts val="400"/>
               </a:spcAft>
-              <a:defRPr sz="1500">
-                <a:solidFill>
-                  <a:srgbClr val="CCCCCC"/>
-                </a:solidFill>
-                <a:latin typeface="Calibri"/>
+              <a:defRPr sz="1100">
+                <a:solidFill>
+                  <a:srgbClr val="1E1E2E"/>
+                </a:solidFill>
               </a:defRPr>
             </a:pPr>
             <a:r>
-              <a:t>Class balancing: expected +5–8% on trash recall (0% → ~30–40%)</a:t>
-            </a:r>
-          </a:p>
-          <a:p>
-            <a:pPr>
-              <a:spcAft>
-                <a:spcPts val="600"/>
-              </a:spcAft>
-              <a:defRPr sz="1500">
-                <a:solidFill>
-                  <a:srgbClr val="CCCCCC"/>
-                </a:solidFill>
-                <a:latin typeface="Calibri"/>
-              </a:defRPr>
-            </a:pPr>
-            <a:r>
-              <a:t>Combined (all fixes): projected 60–70% val accuracy</a:t>
-            </a:r>
-          </a:p>
-          <a:p>
-            <a:pPr>
-              <a:spcAft>
-                <a:spcPts val="600"/>
-              </a:spcAft>
-              <a:defRPr sz="1500">
-                <a:solidFill>
-                  <a:srgbClr val="CCCCCC"/>
-                </a:solidFill>
-                <a:latin typeface="Calibri"/>
-              </a:defRPr>
-            </a:pPr>
-            <a:r>
-              <a:t>Confident learning only corrected 24/445 labels — noise too severe for automated fix</a:t>
-            </a:r>
-          </a:p>
-          <a:p>
-            <a:pPr>
-              <a:spcAft>
-                <a:spcPts val="600"/>
-              </a:spcAft>
-              <a:defRPr sz="1500">
-                <a:solidFill>
-                  <a:srgbClr val="CCCCCC"/>
-                </a:solidFill>
-                <a:latin typeface="Calibri"/>
-              </a:defRPr>
-            </a:pPr>
-            <a:r>
-              <a:t>Recommendation: Human-in-the-loop verification of 318 mislabeled samples</a:t>
-            </a:r>
-          </a:p>
-          <a:p>
-            <a:pPr>
-              <a:spcAft>
-                <a:spcPts val="600"/>
-              </a:spcAft>
-              <a:defRPr sz="1500">
-                <a:solidFill>
-                  <a:srgbClr val="CCCCCC"/>
-                </a:solidFill>
-                <a:latin typeface="Calibri"/>
-              </a:defRPr>
-            </a:pPr>
-            <a:r>
-              <a:t>Best next step: Self-training loop — predict, filter confident (p &gt; 0.6), relabel, retrain</a:t>
+              <a:t>Best next step: Self-training loop — train, predict, filter confident (p &gt; 0.6), relabel, retrain iteratively.</a:t>
             </a:r>
           </a:p>
         </p:txBody>

--- a/reports/Round1_Data_Detective.pptx
+++ b/reports/Round1_Data_Detective.pptx
@@ -3401,7 +3401,7 @@
               </a:defRPr>
             </a:pPr>
             <a:r>
-              <a:t>1. Wrong Labels — 71.5% (318/445) images mislabeled. Folder and filename-prefix labels both unreliable (28.5% agreement).</a:t>
+              <a:t>Comparison against nearest-neighbor consensus: only 28.5% folder labels agree with visual content.</a:t>
             </a:r>
           </a:p>
           <a:p>
@@ -3806,6 +3806,30 @@
           </a:prstGeom>
         </p:spPr>
       </p:pic>
+      <p:pic>
+        <p:nvPicPr>
+          <p:cNvPr id="6" name="Picture 5" descr="noise_transition_matrix.png"/>
+          <p:cNvPicPr>
+            <a:picLocks noChangeAspect="1"/>
+          </p:cNvPicPr>
+          <p:nvPr/>
+        </p:nvPicPr>
+        <p:blipFill>
+          <a:blip r:embed="rId4"/>
+          <a:stretch>
+            <a:fillRect/>
+          </a:stretch>
+        </p:blipFill>
+        <p:spPr>
+          <a:xfrm>
+            <a:off x="457200" y="3657600"/>
+            <a:ext cx="7772400" cy="5029200"/>
+          </a:xfrm>
+          <a:prstGeom prst="rect">
+            <a:avLst/>
+          </a:prstGeom>
+        </p:spPr>
+      </p:pic>
     </p:spTree>
   </p:cSld>
   <p:clrMapOvr>
@@ -3916,7 +3940,7 @@
               </a:defRPr>
             </a:pPr>
             <a:r>
-              <a:t>Fix 2 — Correct Labels: Use folder labels with weighted sampling (NN weakly favors folder over prefix: 30% vs 10%). Self-training loop to iteratively correct mislabels.</a:t>
+              <a:t>Self-training loop to iteratively correct mislabels (train → predict confident → relabel → retrain).</a:t>
             </a:r>
           </a:p>
           <a:p>
